--- a/Planning docs/Slides/lesson-24-4-teacher-slides.pptx
+++ b/Planning docs/Slides/lesson-24-4-teacher-slides.pptx
@@ -4980,7 +4980,7 @@
                 <a:ea typeface="Calibri" pitchFamily="34" charset="-122"/>
                 <a:cs typeface="Calibri" pitchFamily="34" charset="-120"/>
               </a:rPr>
-              <a:t>•  Explaining facts in your own words</a:t>
+              <a:t>•  The article says some things in historical fiction are accurate and some are idealized. Before reading on, predict: which things from The Whipping Boy do you think are historically accurate — and which might be made up?</a:t>
             </a:r>
             <a:endParaRPr lang="en-US" sz="1500" dirty="0"/>
           </a:p>
@@ -4997,24 +4997,7 @@
                 <a:ea typeface="Calibri" pitchFamily="34" charset="-122"/>
                 <a:cs typeface="Calibri" pitchFamily="34" charset="-120"/>
               </a:rPr>
-              <a:t>•  Invent two words of your own and use them in one sentence, so a reader can tell what they mean without being told.</a:t>
-            </a:r>
-            <a:endParaRPr lang="en-US" sz="1500" dirty="0"/>
-          </a:p>
-          <a:p>
-            <a:pPr indent="0" marL="0">
-              <a:buNone/>
-            </a:pPr>
-            <a:r>
-              <a:rPr lang="en-US" sz="1500" dirty="0">
-                <a:solidFill>
-                  <a:srgbClr val="1E293B"/>
-                </a:solidFill>
-                <a:latin typeface="Calibri" pitchFamily="34" charset="0"/>
-                <a:ea typeface="Calibri" pitchFamily="34" charset="-122"/>
-                <a:cs typeface="Calibri" pitchFamily="34" charset="-120"/>
-              </a:rPr>
-              <a:t>•  Look at the letters around the dot in each word. Count: vowel, consonant, consonant, vowel. That's the VCCV pattern .</a:t>
+              <a:t>•  The author says 'Stories borrow from history but add imagination.' Is this a good thing or a bad thing? What are the benefits of reading historical fiction?</a:t>
             </a:r>
             <a:endParaRPr lang="en-US" sz="1500" dirty="0"/>
           </a:p>
